--- a/packages/filesv2/src/assets/templates/empty.pptx
+++ b/packages/filesv2/src/assets/templates/empty.pptx
@@ -60,7 +60,7 @@
             <a:pPr indent="0" algn="ctr">
               <a:buNone/>
             </a:pPr>
-            <a:endParaRPr lang="en-US" sz="4400" b="0" u="none" strike="noStrike">
+            <a:endParaRPr sz="4400" b="0" u="none" strike="noStrike">
               <a:solidFill>
                 <a:srgbClr val="000000"/>
               </a:solidFill>
@@ -102,7 +102,7 @@
             <a:pPr indent="0" algn="ctr">
               <a:buNone/>
             </a:pPr>
-            <a:endParaRPr lang="en-US" sz="3200" b="0" u="none" strike="noStrike">
+            <a:endParaRPr sz="3200" b="0" u="none" strike="noStrike">
               <a:solidFill>
                 <a:srgbClr val="000000"/>
               </a:solidFill>
@@ -168,7 +168,7 @@
           <a:bodyPr/>
           <a:p>
             <a:r>
-              <a:rPr lang="en-US"/>
+              <a:rPr/>
               <a:t/>
             </a:r>
           </a:p>
@@ -232,7 +232,7 @@
                 <a:spcPct val="83000"/>
               </a:lnSpc>
               <a:buNone/>
-              <a:defRPr lang="en-US" sz="4400" b="0" u="none" strike="noStrike">
+              <a:defRPr sz="4400" b="0" u="none" strike="noStrike">
                 <a:solidFill>
                   <a:srgbClr val="000000"/>
                 </a:solidFill>
@@ -250,7 +250,7 @@
               <a:buNone/>
             </a:pPr>
             <a:r>
-              <a:rPr lang="en-US" sz="4400" b="0" u="none" strike="noStrike">
+              <a:rPr sz="4400" b="0" u="none" strike="noStrike">
                 <a:solidFill>
                   <a:srgbClr val="000000"/>
                 </a:solidFill>
@@ -260,7 +260,7 @@
               </a:rPr>
               <a:t>Click to edit the title text format</a:t>
             </a:r>
-            <a:endParaRPr lang="en-US" sz="4400" b="0" u="none" strike="noStrike">
+            <a:endParaRPr sz="4400" b="0" u="none" strike="noStrike">
               <a:solidFill>
                 <a:srgbClr val="000000"/>
               </a:solidFill>
@@ -312,7 +312,7 @@
               <a:buSzPct val="45000"/>
               <a:buFont typeface="Wingdings" charset="2"/>
               <a:buChar char=""/>
-              <a:defRPr lang="en-US" sz="3200" b="0" u="none" strike="noStrike">
+              <a:defRPr sz="3200" b="0" u="none" strike="noStrike">
                 <a:solidFill>
                   <a:srgbClr val="000000"/>
                 </a:solidFill>
@@ -334,7 +334,7 @@
               <a:buSzPct val="75000"/>
               <a:buFont typeface="Symbol" charset="2"/>
               <a:buChar char=""/>
-              <a:defRPr lang="en-US" sz="2800" b="0" u="none" strike="noStrike">
+              <a:defRPr sz="2800" b="0" u="none" strike="noStrike">
                 <a:solidFill>
                   <a:srgbClr val="000000"/>
                 </a:solidFill>
@@ -356,7 +356,7 @@
               <a:buSzPct val="45000"/>
               <a:buFont typeface="Wingdings" charset="2"/>
               <a:buChar char=""/>
-              <a:defRPr lang="en-US" sz="2400" b="0" u="none" strike="noStrike">
+              <a:defRPr sz="2400" b="0" u="none" strike="noStrike">
                 <a:solidFill>
                   <a:srgbClr val="000000"/>
                 </a:solidFill>
@@ -378,7 +378,7 @@
               <a:buSzPct val="75000"/>
               <a:buFont typeface="Symbol" charset="2"/>
               <a:buChar char=""/>
-              <a:defRPr lang="en-US" sz="2000" b="0" u="none" strike="noStrike">
+              <a:defRPr sz="2000" b="0" u="none" strike="noStrike">
                 <a:solidFill>
                   <a:srgbClr val="000000"/>
                 </a:solidFill>
@@ -400,7 +400,7 @@
               <a:buSzPct val="45000"/>
               <a:buFont typeface="Wingdings" charset="2"/>
               <a:buChar char=""/>
-              <a:defRPr lang="en-US" sz="2000" b="0" u="none" strike="noStrike">
+              <a:defRPr sz="2000" b="0" u="none" strike="noStrike">
                 <a:solidFill>
                   <a:srgbClr val="000000"/>
                 </a:solidFill>
@@ -422,7 +422,7 @@
               <a:buSzPct val="45000"/>
               <a:buFont typeface="Wingdings" charset="2"/>
               <a:buChar char=""/>
-              <a:defRPr lang="en-US" sz="2000" b="0" u="none" strike="noStrike">
+              <a:defRPr sz="2000" b="0" u="none" strike="noStrike">
                 <a:solidFill>
                   <a:srgbClr val="000000"/>
                 </a:solidFill>
@@ -444,7 +444,7 @@
               <a:buSzPct val="45000"/>
               <a:buFont typeface="Wingdings" charset="2"/>
               <a:buChar char=""/>
-              <a:defRPr lang="en-US" sz="2000" b="0" u="none" strike="noStrike">
+              <a:defRPr sz="2000" b="0" u="none" strike="noStrike">
                 <a:solidFill>
                   <a:srgbClr val="000000"/>
                 </a:solidFill>
@@ -470,7 +470,7 @@
               <a:buChar char=""/>
             </a:pPr>
             <a:r>
-              <a:rPr lang="en-US" sz="3200" b="0" u="none" strike="noStrike">
+              <a:rPr sz="3200" b="0" u="none" strike="noStrike">
                 <a:solidFill>
                   <a:srgbClr val="000000"/>
                 </a:solidFill>
@@ -480,7 +480,7 @@
               </a:rPr>
               <a:t>Click to edit the outline text format</a:t>
             </a:r>
-            <a:endParaRPr lang="en-US" sz="3200" b="0" u="none" strike="noStrike">
+            <a:endParaRPr sz="3200" b="0" u="none" strike="noStrike">
               <a:solidFill>
                 <a:srgbClr val="000000"/>
               </a:solidFill>
@@ -505,7 +505,7 @@
               <a:buChar char=""/>
             </a:pPr>
             <a:r>
-              <a:rPr lang="en-US" sz="2800" b="0" u="none" strike="noStrike">
+              <a:rPr sz="2800" b="0" u="none" strike="noStrike">
                 <a:solidFill>
                   <a:srgbClr val="000000"/>
                 </a:solidFill>
@@ -515,7 +515,7 @@
               </a:rPr>
               <a:t>Second Outline Level</a:t>
             </a:r>
-            <a:endParaRPr lang="en-US" sz="2800" b="0" u="none" strike="noStrike">
+            <a:endParaRPr sz="2800" b="0" u="none" strike="noStrike">
               <a:solidFill>
                 <a:srgbClr val="000000"/>
               </a:solidFill>
@@ -540,7 +540,7 @@
               <a:buChar char=""/>
             </a:pPr>
             <a:r>
-              <a:rPr lang="en-US" sz="2400" b="0" u="none" strike="noStrike">
+              <a:rPr sz="2400" b="0" u="none" strike="noStrike">
                 <a:solidFill>
                   <a:srgbClr val="000000"/>
                 </a:solidFill>
@@ -550,7 +550,7 @@
               </a:rPr>
               <a:t>Third Outline Level</a:t>
             </a:r>
-            <a:endParaRPr lang="en-US" sz="2400" b="0" u="none" strike="noStrike">
+            <a:endParaRPr sz="2400" b="0" u="none" strike="noStrike">
               <a:solidFill>
                 <a:srgbClr val="000000"/>
               </a:solidFill>
@@ -575,7 +575,7 @@
               <a:buChar char=""/>
             </a:pPr>
             <a:r>
-              <a:rPr lang="en-US" sz="2000" b="0" u="none" strike="noStrike">
+              <a:rPr sz="2000" b="0" u="none" strike="noStrike">
                 <a:solidFill>
                   <a:srgbClr val="000000"/>
                 </a:solidFill>
@@ -585,7 +585,7 @@
               </a:rPr>
               <a:t>Fourth Outline Level</a:t>
             </a:r>
-            <a:endParaRPr lang="en-US" sz="2000" b="0" u="none" strike="noStrike">
+            <a:endParaRPr sz="2000" b="0" u="none" strike="noStrike">
               <a:solidFill>
                 <a:srgbClr val="000000"/>
               </a:solidFill>
@@ -610,7 +610,7 @@
               <a:buChar char=""/>
             </a:pPr>
             <a:r>
-              <a:rPr lang="en-US" sz="2000" b="0" u="none" strike="noStrike">
+              <a:rPr sz="2000" b="0" u="none" strike="noStrike">
                 <a:solidFill>
                   <a:srgbClr val="000000"/>
                 </a:solidFill>
@@ -620,7 +620,7 @@
               </a:rPr>
               <a:t>Fifth Outline Level</a:t>
             </a:r>
-            <a:endParaRPr lang="en-US" sz="2000" b="0" u="none" strike="noStrike">
+            <a:endParaRPr sz="2000" b="0" u="none" strike="noStrike">
               <a:solidFill>
                 <a:srgbClr val="000000"/>
               </a:solidFill>
@@ -645,7 +645,7 @@
               <a:buChar char=""/>
             </a:pPr>
             <a:r>
-              <a:rPr lang="en-US" sz="2000" b="0" u="none" strike="noStrike">
+              <a:rPr sz="2000" b="0" u="none" strike="noStrike">
                 <a:solidFill>
                   <a:srgbClr val="000000"/>
                 </a:solidFill>
@@ -655,7 +655,7 @@
               </a:rPr>
               <a:t>Sixth Outline Level</a:t>
             </a:r>
-            <a:endParaRPr lang="en-US" sz="2000" b="0" u="none" strike="noStrike">
+            <a:endParaRPr sz="2000" b="0" u="none" strike="noStrike">
               <a:solidFill>
                 <a:srgbClr val="000000"/>
               </a:solidFill>
@@ -680,7 +680,7 @@
               <a:buChar char=""/>
             </a:pPr>
             <a:r>
-              <a:rPr lang="en-US" sz="2000" b="0" u="none" strike="noStrike">
+              <a:rPr sz="2000" b="0" u="none" strike="noStrike">
                 <a:solidFill>
                   <a:srgbClr val="000000"/>
                 </a:solidFill>
@@ -690,7 +690,7 @@
               </a:rPr>
               <a:t>Seventh Outline Level</a:t>
             </a:r>
-            <a:endParaRPr lang="en-US" sz="2000" b="0" u="none" strike="noStrike">
+            <a:endParaRPr sz="2000" b="0" u="none" strike="noStrike">
               <a:solidFill>
                 <a:srgbClr val="000000"/>
               </a:solidFill>
@@ -734,7 +734,7 @@
                 <a:spcPct val="83000"/>
               </a:lnSpc>
               <a:buNone/>
-              <a:defRPr lang="en-US" sz="1400" b="0" u="none" strike="noStrike">
+              <a:defRPr sz="1400" b="0" u="none" strike="noStrike">
                 <a:solidFill>
                   <a:srgbClr val="000000"/>
                 </a:solidFill>
@@ -752,7 +752,7 @@
               <a:buNone/>
             </a:pPr>
             <a:fld id="{F525EE5B-5274-4B60-8742-7930095CFBDB}" type="datetime">
-              <a:rPr lang="en-US" sz="1400" b="0" u="none" strike="noStrike">
+              <a:rPr sz="1400" b="0" u="none" strike="noStrike">
                 <a:solidFill>
                   <a:srgbClr val="000000"/>
                 </a:solidFill>
@@ -762,7 +762,7 @@
               </a:rPr>
               <a:t>&lt;date/time&gt;</a:t>
             </a:fld>
-            <a:endParaRPr lang="en-US" sz="1400" b="0" u="none" strike="noStrike">
+            <a:endParaRPr sz="1400" b="0" u="none" strike="noStrike">
               <a:solidFill>
                 <a:srgbClr val="000000"/>
               </a:solidFill>
@@ -806,7 +806,7 @@
                 <a:spcPct val="83000"/>
               </a:lnSpc>
               <a:buNone/>
-              <a:defRPr lang="en-US" sz="1400" b="0" u="none" strike="noStrike">
+              <a:defRPr sz="1400" b="0" u="none" strike="noStrike">
                 <a:solidFill>
                   <a:srgbClr val="000000"/>
                 </a:solidFill>
@@ -824,7 +824,7 @@
               <a:buNone/>
             </a:pPr>
             <a:r>
-              <a:rPr lang="en-US" sz="1400" b="0" u="none" strike="noStrike">
+              <a:rPr sz="1400" b="0" u="none" strike="noStrike">
                 <a:solidFill>
                   <a:srgbClr val="000000"/>
                 </a:solidFill>
@@ -834,7 +834,7 @@
               </a:rPr>
               <a:t>&lt;footer&gt;</a:t>
             </a:r>
-            <a:endParaRPr lang="en-US" sz="1400" b="0" u="none" strike="noStrike">
+            <a:endParaRPr sz="1400" b="0" u="none" strike="noStrike">
               <a:solidFill>
                 <a:srgbClr val="000000"/>
               </a:solidFill>
@@ -878,7 +878,7 @@
                 <a:spcPct val="83000"/>
               </a:lnSpc>
               <a:buNone/>
-              <a:defRPr lang="en-US" sz="1400" b="0" u="none" strike="noStrike">
+              <a:defRPr sz="1400" b="0" u="none" strike="noStrike">
                 <a:solidFill>
                   <a:srgbClr val="000000"/>
                 </a:solidFill>
@@ -896,7 +896,7 @@
               <a:buNone/>
             </a:pPr>
             <a:fld id="{D4095D8A-1395-4A97-A472-49C8C61C5B8A}" type="slidenum">
-              <a:rPr lang="en-US" sz="1400" b="0" u="none" strike="noStrike">
+              <a:rPr sz="1400" b="0" u="none" strike="noStrike">
                 <a:solidFill>
                   <a:srgbClr val="000000"/>
                 </a:solidFill>
@@ -906,7 +906,7 @@
               </a:rPr>
               <a:t>&lt;number&gt;</a:t>
             </a:fld>
-            <a:endParaRPr lang="en-US" sz="1400" b="0" u="none" strike="noStrike">
+            <a:endParaRPr sz="1400" b="0" u="none" strike="noStrike">
               <a:solidFill>
                 <a:srgbClr val="000000"/>
               </a:solidFill>
@@ -926,7 +926,7 @@
   <p:txStyles>
     <p:titleStyle>
       <a:lvl1pPr>
-        <a:defRPr lang="en-US" sz="4400" b="0" u="none" strike="noStrike">
+        <a:defRPr sz="4400" b="0" u="none" strike="noStrike">
           <a:solidFill>
             <a:srgbClr val="000000"/>
           </a:solidFill>
@@ -937,7 +937,7 @@
     </p:titleStyle>
     <p:bodyStyle>
       <a:lvl1pPr>
-        <a:defRPr lang="en-US" sz="3200" b="0" u="none" strike="noStrike">
+        <a:defRPr sz="3200" b="0" u="none" strike="noStrike">
           <a:solidFill>
             <a:srgbClr val="000000"/>
           </a:solidFill>
@@ -946,7 +946,7 @@
         </a:defRPr>
       </a:lvl1pPr>
       <a:lvl2pPr>
-        <a:defRPr lang="en-US" sz="2800" b="0" u="none" strike="noStrike">
+        <a:defRPr sz="2800" b="0" u="none" strike="noStrike">
           <a:solidFill>
             <a:srgbClr val="000000"/>
           </a:solidFill>
@@ -955,7 +955,7 @@
         </a:defRPr>
       </a:lvl2pPr>
       <a:lvl3pPr>
-        <a:defRPr lang="en-US" sz="2400" b="0" u="none" strike="noStrike">
+        <a:defRPr sz="2400" b="0" u="none" strike="noStrike">
           <a:solidFill>
             <a:srgbClr val="000000"/>
           </a:solidFill>
@@ -964,7 +964,7 @@
         </a:defRPr>
       </a:lvl3pPr>
       <a:lvl4pPr>
-        <a:defRPr lang="en-US" sz="2000" b="0" u="none" strike="noStrike">
+        <a:defRPr sz="2000" b="0" u="none" strike="noStrike">
           <a:solidFill>
             <a:srgbClr val="000000"/>
           </a:solidFill>
@@ -973,7 +973,7 @@
         </a:defRPr>
       </a:lvl4pPr>
       <a:lvl5pPr>
-        <a:defRPr lang="en-US" sz="2000" b="0" u="none" strike="noStrike">
+        <a:defRPr sz="2000" b="0" u="none" strike="noStrike">
           <a:solidFill>
             <a:srgbClr val="000000"/>
           </a:solidFill>
@@ -982,7 +982,7 @@
         </a:defRPr>
       </a:lvl5pPr>
       <a:lvl6pPr>
-        <a:defRPr lang="en-US" sz="2000" b="0" u="none" strike="noStrike">
+        <a:defRPr sz="2000" b="0" u="none" strike="noStrike">
           <a:solidFill>
             <a:srgbClr val="000000"/>
           </a:solidFill>
@@ -991,7 +991,7 @@
         </a:defRPr>
       </a:lvl6pPr>
       <a:lvl7pPr>
-        <a:defRPr lang="en-US" sz="2000" b="0" u="none" strike="noStrike">
+        <a:defRPr sz="2000" b="0" u="none" strike="noStrike">
           <a:solidFill>
             <a:srgbClr val="000000"/>
           </a:solidFill>
@@ -1000,7 +1000,7 @@
         </a:defRPr>
       </a:lvl7pPr>
       <a:lvl8pPr>
-        <a:defRPr lang="en-US" sz="2000" b="0" u="none" strike="noStrike">
+        <a:defRPr sz="2000" b="0" u="none" strike="noStrike">
           <a:solidFill>
             <a:srgbClr val="000000"/>
           </a:solidFill>
@@ -1009,7 +1009,7 @@
         </a:defRPr>
       </a:lvl8pPr>
       <a:lvl9pPr>
-        <a:defRPr lang="en-US" sz="2000" b="0" u="none" strike="noStrike">
+        <a:defRPr sz="2000" b="0" u="none" strike="noStrike">
           <a:solidFill>
             <a:srgbClr val="000000"/>
           </a:solidFill>

--- a/packages/filesv2/src/assets/templates/empty.pptx
+++ b/packages/filesv2/src/assets/templates/empty.pptx
@@ -8,7 +8,7 @@
     <p:sldId id="256" r:id="rId3"/>
   </p:sldIdLst>
   <p:sldSz cx="10080625" cy="5670550"/>
-  <p:notesSz cx="7772400" cy="10058400"/>
+  <p:notesSz cx="7560000" cy="10692000"/>
 </p:presentation>
 </file>
 
